--- a/dist/초6/과학/식물과전기/초6_과학_식물과전기_02_전기회로_학생용.pptx
+++ b/dist/초6/과학/식물과전기/초6_과학_식물과전기_02_전기회로_학생용.pptx
@@ -124,13 +124,13 @@
   <p:extLst>
     <p:ext uri="{521415D9-36F7-43E2-AB2F-B90AF26B5E84}">
       <p14:sectionLst xmlns:p14="http://schemas.microsoft.com/office/powerpoint/2010/main">
-        <p14:section name="도입" id="{b501b0ce-7f2c-20c7-5917-0436311b2463}">
+        <p14:section name="도입" id="{c24c2251-b55a-4cd0-f548-50b2d939fab5}">
           <p14:sldIdLst>
             <p14:sldId id="256"/>
             <p14:sldId id="257"/>
           </p14:sldIdLst>
         </p14:section>
-        <p14:section name="연습" id="{b5e83fb8-7f89-8a53-c4e7-bf8352ec863f}">
+        <p14:section name="연습" id="{27416dee-1d1f-303e-8a20-ed0e267bfdf3}">
           <p14:sldIdLst>
             <p14:sldId id="258"/>
             <p14:sldId id="259"/>
@@ -142,7 +142,7 @@
             <p14:sldId id="269"/>
           </p14:sldIdLst>
         </p14:section>
-        <p14:section name="개념" id="{4f831e27-c2a8-e470-5b59-a47c172fc96f}">
+        <p14:section name="개념" id="{17a79bac-eaba-f1de-57ac-faf74094d3ca}">
           <p14:sldIdLst>
             <p14:sldId id="261"/>
             <p14:sldId id="263"/>
@@ -150,33 +150,33 @@
             <p14:sldId id="268"/>
           </p14:sldIdLst>
         </p14:section>
-        <p14:section name="연습" id="{70b3b26c-fb90-2671-40dc-2edd995e19eb}">
+        <p14:section name="연습" id="{1d0d7323-dc24-c34c-9813-ae11056fe4cf}">
           <p14:sldIdLst/>
         </p14:section>
-        <p14:section name="개념" id="{f300fe49-4ccc-afd3-d261-76fc9eb6605b}">
+        <p14:section name="개념" id="{460c63a8-002b-e5f8-b6e9-c56faf35ca1b}">
           <p14:sldIdLst/>
         </p14:section>
-        <p14:section name="연습" id="{af17ea80-0d83-61d3-ee4a-707f43bfb231}">
+        <p14:section name="연습" id="{5b1704b8-ee3d-71da-a3d0-0eda3456c703}">
           <p14:sldIdLst/>
         </p14:section>
-        <p14:section name="개념" id="{cd648acb-6d61-5b1f-ced9-89471b04291c}">
+        <p14:section name="개념" id="{3176a12a-789f-34b9-eaf8-bcd179fa89fb}">
           <p14:sldIdLst/>
         </p14:section>
-        <p14:section name="연습" id="{ccd15af9-57c1-613d-4539-d3c3fd2febdd}">
+        <p14:section name="연습" id="{fd0c5d5c-c04e-29df-65ac-966d77a7f1d4}">
           <p14:sldIdLst/>
         </p14:section>
-        <p14:section name="확인" id="{061396ae-181f-f209-212c-1523d2dc59ca}">
+        <p14:section name="확인" id="{530c17ab-497b-a5ba-99eb-f58181023a87}">
           <p14:sldIdLst>
             <p14:sldId id="270"/>
             <p14:sldId id="271"/>
           </p14:sldIdLst>
         </p14:section>
-        <p14:section name="정리" id="{7afa4eb7-cb74-4507-15e9-152c9faf8ab5}">
+        <p14:section name="정리" id="{ad7076b0-bcb9-3e27-defc-600b6f99061f}">
           <p14:sldIdLst>
             <p14:sldId id="272"/>
           </p14:sldIdLst>
         </p14:section>
-        <p14:section name="보충" id="{1db0aba9-d52a-49a8-cd98-91f82c485efe}">
+        <p14:section name="보충" id="{c0837c18-06de-7363-801a-6362f27f0e5e}">
           <p14:sldIdLst>
             <p14:sldId id="273"/>
           </p14:sldIdLst>
@@ -3803,7 +3803,7 @@
         <p:spPr>
           <a:xfrm>
             <a:off x="7764780" y="1680106"/>
-            <a:ext cx="2750887" cy="0"/>
+            <a:ext cx="2673031" cy="0"/>
           </a:xfrm>
           <a:prstGeom prst="line">
             <a:avLst/>
@@ -3825,7 +3825,7 @@
         </p:nvSpPr>
         <p:spPr>
           <a:xfrm>
-            <a:off x="10515667" y="1680106"/>
+            <a:off x="10437811" y="1680106"/>
             <a:ext cx="0" cy="700698"/>
           </a:xfrm>
           <a:prstGeom prst="line">
@@ -3848,8 +3848,8 @@
         </p:nvSpPr>
         <p:spPr>
           <a:xfrm>
-            <a:off x="10515667" y="2380804"/>
-            <a:ext cx="285469" cy="0"/>
+            <a:off x="10437811" y="2380804"/>
+            <a:ext cx="363325" cy="0"/>
           </a:xfrm>
           <a:prstGeom prst="line">
             <a:avLst/>
@@ -13440,7 +13440,7 @@
         <p:spPr>
           <a:xfrm>
             <a:off x="1803654" y="1697812"/>
-            <a:ext cx="2762402" cy="0"/>
+            <a:ext cx="2684221" cy="0"/>
           </a:xfrm>
           <a:prstGeom prst="line">
             <a:avLst/>
@@ -13462,7 +13462,7 @@
         </p:nvSpPr>
         <p:spPr>
           <a:xfrm>
-            <a:off x="4566056" y="1697812"/>
+            <a:off x="4487875" y="1697812"/>
             <a:ext cx="0" cy="703631"/>
           </a:xfrm>
           <a:prstGeom prst="line">
@@ -13485,8 +13485,8 @@
         </p:nvSpPr>
         <p:spPr>
           <a:xfrm>
-            <a:off x="4566056" y="2401443"/>
-            <a:ext cx="286664" cy="0"/>
+            <a:off x="4487875" y="2401443"/>
+            <a:ext cx="364846" cy="0"/>
           </a:xfrm>
           <a:prstGeom prst="line">
             <a:avLst/>
@@ -19360,7 +19360,7 @@
         <p:spPr>
           <a:xfrm>
             <a:off x="2578308" y="2750786"/>
-            <a:ext cx="4235384" cy="0"/>
+            <a:ext cx="4115515" cy="0"/>
           </a:xfrm>
           <a:prstGeom prst="line">
             <a:avLst/>
@@ -19382,7 +19382,7 @@
         </p:nvSpPr>
         <p:spPr>
           <a:xfrm>
-            <a:off x="6813692" y="2750786"/>
+            <a:off x="6693823" y="2750786"/>
             <a:ext cx="0" cy="1078824"/>
           </a:xfrm>
           <a:prstGeom prst="line">
@@ -19405,8 +19405,8 @@
         </p:nvSpPr>
         <p:spPr>
           <a:xfrm>
-            <a:off x="6813692" y="3829610"/>
-            <a:ext cx="439521" cy="0"/>
+            <a:off x="6693823" y="3829610"/>
+            <a:ext cx="559390" cy="0"/>
           </a:xfrm>
           <a:prstGeom prst="line">
             <a:avLst/>
